--- a/presentation/UNanofabTools/flaskserver/slides/04-Authentication-and-Login.pptx
+++ b/presentation/UNanofabTools/flaskserver/slides/04-Authentication-and-Login.pptx
@@ -953,7 +953,7 @@
           <a:p>
             <a:r>
               <a:rPr lang="en-US" dirty="0"/>
-              <a:t>This is the most reassuring point for a general audience. We never store the password. We store a 'hash' — a scrambled fingerprint produced by a tool called bcrypt that can't be run backwards. When you log in, the server scrambles what you typed and checks whether the two fingerprints match. bcrypt is deliberately slow, so an attacker can't rapidly guess millions of passwords. The upshot: if someone stole the user database, they'd get fingerprints, not passwords.</a:t>
+              <a:t>This is the most reassuring point for a general audience. We never store the password. We store a 'hash' — a scrambled fingerprint produced by a tool called bcrypt that can't be run backwards. One subtlety worth mentioning: the password is scrambled exactly as typed — unlike the username, it's never cleaned or HTML-escaped first, because a value that's only ever hashed gains nothing from escaping and would only be weakened by it. When you log in, the server scrambles what you typed and checks whether the two fingerprints match. bcrypt is deliberately slow, so an attacker can't rapidly guess millions of passwords. The upshot: if someone stole the user database, they'd get fingerprints, not passwords.</a:t>
             </a:r>
             <a:endParaRPr lang="en-US" dirty="0"/>
           </a:p>
@@ -3075,7 +3075,7 @@
                 <a:ea typeface="Calibri" pitchFamily="34" charset="-122"/>
                 <a:cs typeface="Calibri" pitchFamily="34" charset="-120"/>
               </a:rPr>
-              <a:t>login does not mark sessions permanent.</a:t>
+              <a:t>the configured lifetime needs permanent sessions, which login does not set.</a:t>
             </a:r>
             <a:endParaRPr lang="en-US" sz="1400" dirty="0"/>
           </a:p>
@@ -4450,6 +4450,27 @@
                 <a:ea typeface="Calibri" pitchFamily="34" charset="-122"/>
                 <a:cs typeface="Calibri" pitchFamily="34" charset="-120"/>
               </a:rPr>
+              <a:t>The password is taken exactly as typed — never trimmed or escaped — then scrambled.</a:t>
+            </a:r>
+            <a:endParaRPr lang="en-US" sz="1500" dirty="0"/>
+          </a:p>
+          <a:p>
+            <a:pPr marL="228600" indent="-228600">
+              <a:spcAft>
+                <a:spcPts val="1000"/>
+              </a:spcAft>
+              <a:buSzPct val="100000"/>
+              <a:buChar char="•"/>
+            </a:pPr>
+            <a:r>
+              <a:rPr lang="en-US" sz="1500" dirty="0">
+                <a:solidFill>
+                  <a:srgbClr val="1A1A1A"/>
+                </a:solidFill>
+                <a:latin typeface="Calibri" pitchFamily="34" charset="0"/>
+                <a:ea typeface="Calibri" pitchFamily="34" charset="-122"/>
+                <a:cs typeface="Calibri" pitchFamily="34" charset="-120"/>
+              </a:rPr>
               <a:t>Logging in re-scrambles what you typed and compares the fingerprints.</a:t>
             </a:r>
             <a:endParaRPr lang="en-US" sz="1500" dirty="0"/>
@@ -5100,7 +5121,7 @@
                 <a:ea typeface="Calibri" pitchFamily="34" charset="-122"/>
                 <a:cs typeface="Calibri" pitchFamily="34" charset="-120"/>
               </a:rPr>
-              <a:t>Two-hour lifetime is not enforced unless sessions are permanent.</a:t>
+              <a:t>The configured two-hour lifetime is not enforced unless sessions are marked permanent.</a:t>
             </a:r>
             <a:endParaRPr lang="en-US" sz="1500" dirty="0"/>
           </a:p>
